--- a/app/src-tauri/templates/vierge.pptx
+++ b/app/src-tauri/templates/vierge.pptx
@@ -11,7 +11,7 @@
   <p:notesSz cx="6858000" cy="9144000"/>
   <p:defaultTextStyle>
     <a:defPPr>
-      <a:defRPr lang="en-US"/>
+      <a:defRPr lang="fr-CA"/>
     </a:defPPr>
     <a:lvl1pPr marL="0" algn="l" defTabSz="457200" rtl="0" eaLnBrk="1" latinLnBrk="0" hangingPunct="1">
       <a:defRPr sz="1800" kern="1200">
@@ -145,10 +145,10 @@
           <a:lstStyle/>
           <a:p>
             <a:r>
-              <a:rPr lang="en-US" smtClean="0"/>
+              <a:rPr lang="fr-CA" smtClean="0"/>
               <a:t>Click to edit Master title style</a:t>
             </a:r>
-            <a:endParaRPr lang="en-US"/>
+            <a:endParaRPr lang="fr-CA"/>
           </a:p>
         </p:txBody>
       </p:sp>
@@ -264,10 +264,10 @@
           </a:lstStyle>
           <a:p>
             <a:r>
-              <a:rPr lang="en-US" smtClean="0"/>
+              <a:rPr lang="fr-CA" smtClean="0"/>
               <a:t>Click to edit Master subtitle style</a:t>
             </a:r>
-            <a:endParaRPr lang="en-US"/>
+            <a:endParaRPr lang="fr-CA"/>
           </a:p>
         </p:txBody>
       </p:sp>
@@ -287,10 +287,10 @@
           <a:lstStyle/>
           <a:p>
             <a:fld id="{5BCAD085-E8A6-8845-BD4E-CB4CCA059FC4}" type="datetimeFigureOut">
-              <a:rPr lang="en-US" smtClean="0"/>
+              <a:rPr lang="fr-CA" smtClean="0"/>
               <a:t>1/27/13</a:t>
             </a:fld>
-            <a:endParaRPr lang="en-US"/>
+            <a:endParaRPr lang="fr-CA"/>
           </a:p>
         </p:txBody>
       </p:sp>
@@ -309,7 +309,7 @@
           <a:bodyPr/>
           <a:lstStyle/>
           <a:p>
-            <a:endParaRPr lang="en-US"/>
+            <a:endParaRPr lang="fr-CA"/>
           </a:p>
         </p:txBody>
       </p:sp>
@@ -329,10 +329,10 @@
           <a:lstStyle/>
           <a:p>
             <a:fld id="{C1FF6DA9-008F-8B48-92A6-B652298478BF}" type="slidenum">
-              <a:rPr lang="en-US" smtClean="0"/>
+              <a:rPr lang="fr-CA" smtClean="0"/>
               <a:t>‹#›</a:t>
             </a:fld>
-            <a:endParaRPr lang="en-US"/>
+            <a:endParaRPr lang="fr-CA"/>
           </a:p>
         </p:txBody>
       </p:sp>
@@ -382,10 +382,10 @@
           <a:lstStyle/>
           <a:p>
             <a:r>
-              <a:rPr lang="en-US" smtClean="0"/>
+              <a:rPr lang="fr-CA" smtClean="0"/>
               <a:t>Click to edit Master title style</a:t>
             </a:r>
-            <a:endParaRPr lang="en-US"/>
+            <a:endParaRPr lang="fr-CA"/>
           </a:p>
         </p:txBody>
       </p:sp>
@@ -406,38 +406,38 @@
           <a:p>
             <a:pPr lvl="0"/>
             <a:r>
-              <a:rPr lang="en-US" smtClean="0"/>
+              <a:rPr lang="fr-CA" smtClean="0"/>
               <a:t>Click to edit Master text styles</a:t>
             </a:r>
           </a:p>
           <a:p>
             <a:pPr lvl="1"/>
             <a:r>
-              <a:rPr lang="en-US" smtClean="0"/>
+              <a:rPr lang="fr-CA" smtClean="0"/>
               <a:t>Second level</a:t>
             </a:r>
           </a:p>
           <a:p>
             <a:pPr lvl="2"/>
             <a:r>
-              <a:rPr lang="en-US" smtClean="0"/>
+              <a:rPr lang="fr-CA" smtClean="0"/>
               <a:t>Third level</a:t>
             </a:r>
           </a:p>
           <a:p>
             <a:pPr lvl="3"/>
             <a:r>
-              <a:rPr lang="en-US" smtClean="0"/>
+              <a:rPr lang="fr-CA" smtClean="0"/>
               <a:t>Fourth level</a:t>
             </a:r>
           </a:p>
           <a:p>
             <a:pPr lvl="4"/>
             <a:r>
-              <a:rPr lang="en-US" smtClean="0"/>
+              <a:rPr lang="fr-CA" smtClean="0"/>
               <a:t>Fifth level</a:t>
             </a:r>
-            <a:endParaRPr lang="en-US"/>
+            <a:endParaRPr lang="fr-CA"/>
           </a:p>
         </p:txBody>
       </p:sp>
@@ -457,10 +457,10 @@
           <a:lstStyle/>
           <a:p>
             <a:fld id="{5BCAD085-E8A6-8845-BD4E-CB4CCA059FC4}" type="datetimeFigureOut">
-              <a:rPr lang="en-US" smtClean="0"/>
+              <a:rPr lang="fr-CA" smtClean="0"/>
               <a:t>1/27/13</a:t>
             </a:fld>
-            <a:endParaRPr lang="en-US"/>
+            <a:endParaRPr lang="fr-CA"/>
           </a:p>
         </p:txBody>
       </p:sp>
@@ -479,7 +479,7 @@
           <a:bodyPr/>
           <a:lstStyle/>
           <a:p>
-            <a:endParaRPr lang="en-US"/>
+            <a:endParaRPr lang="fr-CA"/>
           </a:p>
         </p:txBody>
       </p:sp>
@@ -499,10 +499,10 @@
           <a:lstStyle/>
           <a:p>
             <a:fld id="{C1FF6DA9-008F-8B48-92A6-B652298478BF}" type="slidenum">
-              <a:rPr lang="en-US" smtClean="0"/>
+              <a:rPr lang="fr-CA" smtClean="0"/>
               <a:t>‹#›</a:t>
             </a:fld>
-            <a:endParaRPr lang="en-US"/>
+            <a:endParaRPr lang="fr-CA"/>
           </a:p>
         </p:txBody>
       </p:sp>
@@ -557,10 +557,10 @@
           <a:lstStyle/>
           <a:p>
             <a:r>
-              <a:rPr lang="en-US" smtClean="0"/>
+              <a:rPr lang="fr-CA" smtClean="0"/>
               <a:t>Click to edit Master title style</a:t>
             </a:r>
-            <a:endParaRPr lang="en-US"/>
+            <a:endParaRPr lang="fr-CA"/>
           </a:p>
         </p:txBody>
       </p:sp>
@@ -586,38 +586,38 @@
           <a:p>
             <a:pPr lvl="0"/>
             <a:r>
-              <a:rPr lang="en-US" smtClean="0"/>
+              <a:rPr lang="fr-CA" smtClean="0"/>
               <a:t>Click to edit Master text styles</a:t>
             </a:r>
           </a:p>
           <a:p>
             <a:pPr lvl="1"/>
             <a:r>
-              <a:rPr lang="en-US" smtClean="0"/>
+              <a:rPr lang="fr-CA" smtClean="0"/>
               <a:t>Second level</a:t>
             </a:r>
           </a:p>
           <a:p>
             <a:pPr lvl="2"/>
             <a:r>
-              <a:rPr lang="en-US" smtClean="0"/>
+              <a:rPr lang="fr-CA" smtClean="0"/>
               <a:t>Third level</a:t>
             </a:r>
           </a:p>
           <a:p>
             <a:pPr lvl="3"/>
             <a:r>
-              <a:rPr lang="en-US" smtClean="0"/>
+              <a:rPr lang="fr-CA" smtClean="0"/>
               <a:t>Fourth level</a:t>
             </a:r>
           </a:p>
           <a:p>
             <a:pPr lvl="4"/>
             <a:r>
-              <a:rPr lang="en-US" smtClean="0"/>
+              <a:rPr lang="fr-CA" smtClean="0"/>
               <a:t>Fifth level</a:t>
             </a:r>
-            <a:endParaRPr lang="en-US"/>
+            <a:endParaRPr lang="fr-CA"/>
           </a:p>
         </p:txBody>
       </p:sp>
@@ -637,10 +637,10 @@
           <a:lstStyle/>
           <a:p>
             <a:fld id="{5BCAD085-E8A6-8845-BD4E-CB4CCA059FC4}" type="datetimeFigureOut">
-              <a:rPr lang="en-US" smtClean="0"/>
+              <a:rPr lang="fr-CA" smtClean="0"/>
               <a:t>1/27/13</a:t>
             </a:fld>
-            <a:endParaRPr lang="en-US"/>
+            <a:endParaRPr lang="fr-CA"/>
           </a:p>
         </p:txBody>
       </p:sp>
@@ -659,7 +659,7 @@
           <a:bodyPr/>
           <a:lstStyle/>
           <a:p>
-            <a:endParaRPr lang="en-US"/>
+            <a:endParaRPr lang="fr-CA"/>
           </a:p>
         </p:txBody>
       </p:sp>
@@ -679,10 +679,10 @@
           <a:lstStyle/>
           <a:p>
             <a:fld id="{C1FF6DA9-008F-8B48-92A6-B652298478BF}" type="slidenum">
-              <a:rPr lang="en-US" smtClean="0"/>
+              <a:rPr lang="fr-CA" smtClean="0"/>
               <a:t>‹#›</a:t>
             </a:fld>
-            <a:endParaRPr lang="en-US"/>
+            <a:endParaRPr lang="fr-CA"/>
           </a:p>
         </p:txBody>
       </p:sp>
@@ -732,10 +732,10 @@
           <a:lstStyle/>
           <a:p>
             <a:r>
-              <a:rPr lang="en-US" smtClean="0"/>
+              <a:rPr lang="fr-CA" smtClean="0"/>
               <a:t>Click to edit Master title style</a:t>
             </a:r>
-            <a:endParaRPr lang="en-US"/>
+            <a:endParaRPr lang="fr-CA"/>
           </a:p>
         </p:txBody>
       </p:sp>
@@ -756,38 +756,38 @@
           <a:p>
             <a:pPr lvl="0"/>
             <a:r>
-              <a:rPr lang="en-US" smtClean="0"/>
+              <a:rPr lang="fr-CA" smtClean="0"/>
               <a:t>Click to edit Master text styles</a:t>
             </a:r>
           </a:p>
           <a:p>
             <a:pPr lvl="1"/>
             <a:r>
-              <a:rPr lang="en-US" smtClean="0"/>
+              <a:rPr lang="fr-CA" smtClean="0"/>
               <a:t>Second level</a:t>
             </a:r>
           </a:p>
           <a:p>
             <a:pPr lvl="2"/>
             <a:r>
-              <a:rPr lang="en-US" smtClean="0"/>
+              <a:rPr lang="fr-CA" smtClean="0"/>
               <a:t>Third level</a:t>
             </a:r>
           </a:p>
           <a:p>
             <a:pPr lvl="3"/>
             <a:r>
-              <a:rPr lang="en-US" smtClean="0"/>
+              <a:rPr lang="fr-CA" smtClean="0"/>
               <a:t>Fourth level</a:t>
             </a:r>
           </a:p>
           <a:p>
             <a:pPr lvl="4"/>
             <a:r>
-              <a:rPr lang="en-US" smtClean="0"/>
+              <a:rPr lang="fr-CA" smtClean="0"/>
               <a:t>Fifth level</a:t>
             </a:r>
-            <a:endParaRPr lang="en-US"/>
+            <a:endParaRPr lang="fr-CA"/>
           </a:p>
         </p:txBody>
       </p:sp>
@@ -807,10 +807,10 @@
           <a:lstStyle/>
           <a:p>
             <a:fld id="{5BCAD085-E8A6-8845-BD4E-CB4CCA059FC4}" type="datetimeFigureOut">
-              <a:rPr lang="en-US" smtClean="0"/>
+              <a:rPr lang="fr-CA" smtClean="0"/>
               <a:t>1/27/13</a:t>
             </a:fld>
-            <a:endParaRPr lang="en-US"/>
+            <a:endParaRPr lang="fr-CA"/>
           </a:p>
         </p:txBody>
       </p:sp>
@@ -829,7 +829,7 @@
           <a:bodyPr/>
           <a:lstStyle/>
           <a:p>
-            <a:endParaRPr lang="en-US"/>
+            <a:endParaRPr lang="fr-CA"/>
           </a:p>
         </p:txBody>
       </p:sp>
@@ -849,10 +849,10 @@
           <a:lstStyle/>
           <a:p>
             <a:fld id="{C1FF6DA9-008F-8B48-92A6-B652298478BF}" type="slidenum">
-              <a:rPr lang="en-US" smtClean="0"/>
+              <a:rPr lang="fr-CA" smtClean="0"/>
               <a:t>‹#›</a:t>
             </a:fld>
-            <a:endParaRPr lang="en-US"/>
+            <a:endParaRPr lang="fr-CA"/>
           </a:p>
         </p:txBody>
       </p:sp>
@@ -911,10 +911,10 @@
           </a:lstStyle>
           <a:p>
             <a:r>
-              <a:rPr lang="en-US" smtClean="0"/>
+              <a:rPr lang="fr-CA" smtClean="0"/>
               <a:t>Click to edit Master title style</a:t>
             </a:r>
-            <a:endParaRPr lang="en-US"/>
+            <a:endParaRPr lang="fr-CA"/>
           </a:p>
         </p:txBody>
       </p:sp>
@@ -1031,7 +1031,7 @@
           <a:p>
             <a:pPr lvl="0"/>
             <a:r>
-              <a:rPr lang="en-US" smtClean="0"/>
+              <a:rPr lang="fr-CA" smtClean="0"/>
               <a:t>Click to edit Master text styles</a:t>
             </a:r>
           </a:p>
@@ -1053,10 +1053,10 @@
           <a:lstStyle/>
           <a:p>
             <a:fld id="{5BCAD085-E8A6-8845-BD4E-CB4CCA059FC4}" type="datetimeFigureOut">
-              <a:rPr lang="en-US" smtClean="0"/>
+              <a:rPr lang="fr-CA" smtClean="0"/>
               <a:t>1/27/13</a:t>
             </a:fld>
-            <a:endParaRPr lang="en-US"/>
+            <a:endParaRPr lang="fr-CA"/>
           </a:p>
         </p:txBody>
       </p:sp>
@@ -1075,7 +1075,7 @@
           <a:bodyPr/>
           <a:lstStyle/>
           <a:p>
-            <a:endParaRPr lang="en-US"/>
+            <a:endParaRPr lang="fr-CA"/>
           </a:p>
         </p:txBody>
       </p:sp>
@@ -1095,10 +1095,10 @@
           <a:lstStyle/>
           <a:p>
             <a:fld id="{C1FF6DA9-008F-8B48-92A6-B652298478BF}" type="slidenum">
-              <a:rPr lang="en-US" smtClean="0"/>
+              <a:rPr lang="fr-CA" smtClean="0"/>
               <a:t>‹#›</a:t>
             </a:fld>
-            <a:endParaRPr lang="en-US"/>
+            <a:endParaRPr lang="fr-CA"/>
           </a:p>
         </p:txBody>
       </p:sp>
@@ -1148,10 +1148,10 @@
           <a:lstStyle/>
           <a:p>
             <a:r>
-              <a:rPr lang="en-US" smtClean="0"/>
+              <a:rPr lang="fr-CA" smtClean="0"/>
               <a:t>Click to edit Master title style</a:t>
             </a:r>
-            <a:endParaRPr lang="en-US"/>
+            <a:endParaRPr lang="fr-CA"/>
           </a:p>
         </p:txBody>
       </p:sp>
@@ -1205,38 +1205,38 @@
           <a:p>
             <a:pPr lvl="0"/>
             <a:r>
-              <a:rPr lang="en-US" smtClean="0"/>
+              <a:rPr lang="fr-CA" smtClean="0"/>
               <a:t>Click to edit Master text styles</a:t>
             </a:r>
           </a:p>
           <a:p>
             <a:pPr lvl="1"/>
             <a:r>
-              <a:rPr lang="en-US" smtClean="0"/>
+              <a:rPr lang="fr-CA" smtClean="0"/>
               <a:t>Second level</a:t>
             </a:r>
           </a:p>
           <a:p>
             <a:pPr lvl="2"/>
             <a:r>
-              <a:rPr lang="en-US" smtClean="0"/>
+              <a:rPr lang="fr-CA" smtClean="0"/>
               <a:t>Third level</a:t>
             </a:r>
           </a:p>
           <a:p>
             <a:pPr lvl="3"/>
             <a:r>
-              <a:rPr lang="en-US" smtClean="0"/>
+              <a:rPr lang="fr-CA" smtClean="0"/>
               <a:t>Fourth level</a:t>
             </a:r>
           </a:p>
           <a:p>
             <a:pPr lvl="4"/>
             <a:r>
-              <a:rPr lang="en-US" smtClean="0"/>
+              <a:rPr lang="fr-CA" smtClean="0"/>
               <a:t>Fifth level</a:t>
             </a:r>
-            <a:endParaRPr lang="en-US"/>
+            <a:endParaRPr lang="fr-CA"/>
           </a:p>
         </p:txBody>
       </p:sp>
@@ -1290,38 +1290,38 @@
           <a:p>
             <a:pPr lvl="0"/>
             <a:r>
-              <a:rPr lang="en-US" smtClean="0"/>
+              <a:rPr lang="fr-CA" smtClean="0"/>
               <a:t>Click to edit Master text styles</a:t>
             </a:r>
           </a:p>
           <a:p>
             <a:pPr lvl="1"/>
             <a:r>
-              <a:rPr lang="en-US" smtClean="0"/>
+              <a:rPr lang="fr-CA" smtClean="0"/>
               <a:t>Second level</a:t>
             </a:r>
           </a:p>
           <a:p>
             <a:pPr lvl="2"/>
             <a:r>
-              <a:rPr lang="en-US" smtClean="0"/>
+              <a:rPr lang="fr-CA" smtClean="0"/>
               <a:t>Third level</a:t>
             </a:r>
           </a:p>
           <a:p>
             <a:pPr lvl="3"/>
             <a:r>
-              <a:rPr lang="en-US" smtClean="0"/>
+              <a:rPr lang="fr-CA" smtClean="0"/>
               <a:t>Fourth level</a:t>
             </a:r>
           </a:p>
           <a:p>
             <a:pPr lvl="4"/>
             <a:r>
-              <a:rPr lang="en-US" smtClean="0"/>
+              <a:rPr lang="fr-CA" smtClean="0"/>
               <a:t>Fifth level</a:t>
             </a:r>
-            <a:endParaRPr lang="en-US"/>
+            <a:endParaRPr lang="fr-CA"/>
           </a:p>
         </p:txBody>
       </p:sp>
@@ -1341,10 +1341,10 @@
           <a:lstStyle/>
           <a:p>
             <a:fld id="{5BCAD085-E8A6-8845-BD4E-CB4CCA059FC4}" type="datetimeFigureOut">
-              <a:rPr lang="en-US" smtClean="0"/>
+              <a:rPr lang="fr-CA" smtClean="0"/>
               <a:t>1/27/13</a:t>
             </a:fld>
-            <a:endParaRPr lang="en-US"/>
+            <a:endParaRPr lang="fr-CA"/>
           </a:p>
         </p:txBody>
       </p:sp>
@@ -1363,7 +1363,7 @@
           <a:bodyPr/>
           <a:lstStyle/>
           <a:p>
-            <a:endParaRPr lang="en-US"/>
+            <a:endParaRPr lang="fr-CA"/>
           </a:p>
         </p:txBody>
       </p:sp>
@@ -1383,10 +1383,10 @@
           <a:lstStyle/>
           <a:p>
             <a:fld id="{C1FF6DA9-008F-8B48-92A6-B652298478BF}" type="slidenum">
-              <a:rPr lang="en-US" smtClean="0"/>
+              <a:rPr lang="fr-CA" smtClean="0"/>
               <a:t>‹#›</a:t>
             </a:fld>
-            <a:endParaRPr lang="en-US"/>
+            <a:endParaRPr lang="fr-CA"/>
           </a:p>
         </p:txBody>
       </p:sp>
@@ -1440,10 +1440,10 @@
           </a:lstStyle>
           <a:p>
             <a:r>
-              <a:rPr lang="en-US" smtClean="0"/>
+              <a:rPr lang="fr-CA" smtClean="0"/>
               <a:t>Click to edit Master title style</a:t>
             </a:r>
-            <a:endParaRPr lang="en-US"/>
+            <a:endParaRPr lang="fr-CA"/>
           </a:p>
         </p:txBody>
       </p:sp>
@@ -1506,7 +1506,7 @@
           <a:p>
             <a:pPr lvl="0"/>
             <a:r>
-              <a:rPr lang="en-US" smtClean="0"/>
+              <a:rPr lang="fr-CA" smtClean="0"/>
               <a:t>Click to edit Master text styles</a:t>
             </a:r>
           </a:p>
@@ -1562,38 +1562,38 @@
           <a:p>
             <a:pPr lvl="0"/>
             <a:r>
-              <a:rPr lang="en-US" smtClean="0"/>
+              <a:rPr lang="fr-CA" smtClean="0"/>
               <a:t>Click to edit Master text styles</a:t>
             </a:r>
           </a:p>
           <a:p>
             <a:pPr lvl="1"/>
             <a:r>
-              <a:rPr lang="en-US" smtClean="0"/>
+              <a:rPr lang="fr-CA" smtClean="0"/>
               <a:t>Second level</a:t>
             </a:r>
           </a:p>
           <a:p>
             <a:pPr lvl="2"/>
             <a:r>
-              <a:rPr lang="en-US" smtClean="0"/>
+              <a:rPr lang="fr-CA" smtClean="0"/>
               <a:t>Third level</a:t>
             </a:r>
           </a:p>
           <a:p>
             <a:pPr lvl="3"/>
             <a:r>
-              <a:rPr lang="en-US" smtClean="0"/>
+              <a:rPr lang="fr-CA" smtClean="0"/>
               <a:t>Fourth level</a:t>
             </a:r>
           </a:p>
           <a:p>
             <a:pPr lvl="4"/>
             <a:r>
-              <a:rPr lang="en-US" smtClean="0"/>
+              <a:rPr lang="fr-CA" smtClean="0"/>
               <a:t>Fifth level</a:t>
             </a:r>
-            <a:endParaRPr lang="en-US"/>
+            <a:endParaRPr lang="fr-CA"/>
           </a:p>
         </p:txBody>
       </p:sp>
@@ -1656,7 +1656,7 @@
           <a:p>
             <a:pPr lvl="0"/>
             <a:r>
-              <a:rPr lang="en-US" smtClean="0"/>
+              <a:rPr lang="fr-CA" smtClean="0"/>
               <a:t>Click to edit Master text styles</a:t>
             </a:r>
           </a:p>
@@ -1712,38 +1712,38 @@
           <a:p>
             <a:pPr lvl="0"/>
             <a:r>
-              <a:rPr lang="en-US" smtClean="0"/>
+              <a:rPr lang="fr-CA" smtClean="0"/>
               <a:t>Click to edit Master text styles</a:t>
             </a:r>
           </a:p>
           <a:p>
             <a:pPr lvl="1"/>
             <a:r>
-              <a:rPr lang="en-US" smtClean="0"/>
+              <a:rPr lang="fr-CA" smtClean="0"/>
               <a:t>Second level</a:t>
             </a:r>
           </a:p>
           <a:p>
             <a:pPr lvl="2"/>
             <a:r>
-              <a:rPr lang="en-US" smtClean="0"/>
+              <a:rPr lang="fr-CA" smtClean="0"/>
               <a:t>Third level</a:t>
             </a:r>
           </a:p>
           <a:p>
             <a:pPr lvl="3"/>
             <a:r>
-              <a:rPr lang="en-US" smtClean="0"/>
+              <a:rPr lang="fr-CA" smtClean="0"/>
               <a:t>Fourth level</a:t>
             </a:r>
           </a:p>
           <a:p>
             <a:pPr lvl="4"/>
             <a:r>
-              <a:rPr lang="en-US" smtClean="0"/>
+              <a:rPr lang="fr-CA" smtClean="0"/>
               <a:t>Fifth level</a:t>
             </a:r>
-            <a:endParaRPr lang="en-US"/>
+            <a:endParaRPr lang="fr-CA"/>
           </a:p>
         </p:txBody>
       </p:sp>
@@ -1763,10 +1763,10 @@
           <a:lstStyle/>
           <a:p>
             <a:fld id="{5BCAD085-E8A6-8845-BD4E-CB4CCA059FC4}" type="datetimeFigureOut">
-              <a:rPr lang="en-US" smtClean="0"/>
+              <a:rPr lang="fr-CA" smtClean="0"/>
               <a:t>1/27/13</a:t>
             </a:fld>
-            <a:endParaRPr lang="en-US"/>
+            <a:endParaRPr lang="fr-CA"/>
           </a:p>
         </p:txBody>
       </p:sp>
@@ -1785,7 +1785,7 @@
           <a:bodyPr/>
           <a:lstStyle/>
           <a:p>
-            <a:endParaRPr lang="en-US"/>
+            <a:endParaRPr lang="fr-CA"/>
           </a:p>
         </p:txBody>
       </p:sp>
@@ -1805,10 +1805,10 @@
           <a:lstStyle/>
           <a:p>
             <a:fld id="{C1FF6DA9-008F-8B48-92A6-B652298478BF}" type="slidenum">
-              <a:rPr lang="en-US" smtClean="0"/>
+              <a:rPr lang="fr-CA" smtClean="0"/>
               <a:t>‹#›</a:t>
             </a:fld>
-            <a:endParaRPr lang="en-US"/>
+            <a:endParaRPr lang="fr-CA"/>
           </a:p>
         </p:txBody>
       </p:sp>
@@ -1858,10 +1858,10 @@
           <a:lstStyle/>
           <a:p>
             <a:r>
-              <a:rPr lang="en-US" smtClean="0"/>
+              <a:rPr lang="fr-CA" smtClean="0"/>
               <a:t>Click to edit Master title style</a:t>
             </a:r>
-            <a:endParaRPr lang="en-US"/>
+            <a:endParaRPr lang="fr-CA"/>
           </a:p>
         </p:txBody>
       </p:sp>
@@ -1881,10 +1881,10 @@
           <a:lstStyle/>
           <a:p>
             <a:fld id="{5BCAD085-E8A6-8845-BD4E-CB4CCA059FC4}" type="datetimeFigureOut">
-              <a:rPr lang="en-US" smtClean="0"/>
+              <a:rPr lang="fr-CA" smtClean="0"/>
               <a:t>1/27/13</a:t>
             </a:fld>
-            <a:endParaRPr lang="en-US"/>
+            <a:endParaRPr lang="fr-CA"/>
           </a:p>
         </p:txBody>
       </p:sp>
@@ -1903,7 +1903,7 @@
           <a:bodyPr/>
           <a:lstStyle/>
           <a:p>
-            <a:endParaRPr lang="en-US"/>
+            <a:endParaRPr lang="fr-CA"/>
           </a:p>
         </p:txBody>
       </p:sp>
@@ -1923,10 +1923,10 @@
           <a:lstStyle/>
           <a:p>
             <a:fld id="{C1FF6DA9-008F-8B48-92A6-B652298478BF}" type="slidenum">
-              <a:rPr lang="en-US" smtClean="0"/>
+              <a:rPr lang="fr-CA" smtClean="0"/>
               <a:t>‹#›</a:t>
             </a:fld>
-            <a:endParaRPr lang="en-US"/>
+            <a:endParaRPr lang="fr-CA"/>
           </a:p>
         </p:txBody>
       </p:sp>
@@ -1976,10 +1976,10 @@
           <a:lstStyle/>
           <a:p>
             <a:fld id="{5BCAD085-E8A6-8845-BD4E-CB4CCA059FC4}" type="datetimeFigureOut">
-              <a:rPr lang="en-US" smtClean="0"/>
+              <a:rPr lang="fr-CA" smtClean="0"/>
               <a:t>1/27/13</a:t>
             </a:fld>
-            <a:endParaRPr lang="en-US"/>
+            <a:endParaRPr lang="fr-CA"/>
           </a:p>
         </p:txBody>
       </p:sp>
@@ -1998,7 +1998,7 @@
           <a:bodyPr/>
           <a:lstStyle/>
           <a:p>
-            <a:endParaRPr lang="en-US"/>
+            <a:endParaRPr lang="fr-CA"/>
           </a:p>
         </p:txBody>
       </p:sp>
@@ -2018,10 +2018,10 @@
           <a:lstStyle/>
           <a:p>
             <a:fld id="{C1FF6DA9-008F-8B48-92A6-B652298478BF}" type="slidenum">
-              <a:rPr lang="en-US" smtClean="0"/>
+              <a:rPr lang="fr-CA" smtClean="0"/>
               <a:t>‹#›</a:t>
             </a:fld>
-            <a:endParaRPr lang="en-US"/>
+            <a:endParaRPr lang="fr-CA"/>
           </a:p>
         </p:txBody>
       </p:sp>
@@ -2080,10 +2080,10 @@
           </a:lstStyle>
           <a:p>
             <a:r>
-              <a:rPr lang="en-US" smtClean="0"/>
+              <a:rPr lang="fr-CA" smtClean="0"/>
               <a:t>Click to edit Master title style</a:t>
             </a:r>
-            <a:endParaRPr lang="en-US"/>
+            <a:endParaRPr lang="fr-CA"/>
           </a:p>
         </p:txBody>
       </p:sp>
@@ -2137,38 +2137,38 @@
           <a:p>
             <a:pPr lvl="0"/>
             <a:r>
-              <a:rPr lang="en-US" smtClean="0"/>
+              <a:rPr lang="fr-CA" smtClean="0"/>
               <a:t>Click to edit Master text styles</a:t>
             </a:r>
           </a:p>
           <a:p>
             <a:pPr lvl="1"/>
             <a:r>
-              <a:rPr lang="en-US" smtClean="0"/>
+              <a:rPr lang="fr-CA" smtClean="0"/>
               <a:t>Second level</a:t>
             </a:r>
           </a:p>
           <a:p>
             <a:pPr lvl="2"/>
             <a:r>
-              <a:rPr lang="en-US" smtClean="0"/>
+              <a:rPr lang="fr-CA" smtClean="0"/>
               <a:t>Third level</a:t>
             </a:r>
           </a:p>
           <a:p>
             <a:pPr lvl="3"/>
             <a:r>
-              <a:rPr lang="en-US" smtClean="0"/>
+              <a:rPr lang="fr-CA" smtClean="0"/>
               <a:t>Fourth level</a:t>
             </a:r>
           </a:p>
           <a:p>
             <a:pPr lvl="4"/>
             <a:r>
-              <a:rPr lang="en-US" smtClean="0"/>
+              <a:rPr lang="fr-CA" smtClean="0"/>
               <a:t>Fifth level</a:t>
             </a:r>
-            <a:endParaRPr lang="en-US"/>
+            <a:endParaRPr lang="fr-CA"/>
           </a:p>
         </p:txBody>
       </p:sp>
@@ -2231,7 +2231,7 @@
           <a:p>
             <a:pPr lvl="0"/>
             <a:r>
-              <a:rPr lang="en-US" smtClean="0"/>
+              <a:rPr lang="fr-CA" smtClean="0"/>
               <a:t>Click to edit Master text styles</a:t>
             </a:r>
           </a:p>
@@ -2253,10 +2253,10 @@
           <a:lstStyle/>
           <a:p>
             <a:fld id="{5BCAD085-E8A6-8845-BD4E-CB4CCA059FC4}" type="datetimeFigureOut">
-              <a:rPr lang="en-US" smtClean="0"/>
+              <a:rPr lang="fr-CA" smtClean="0"/>
               <a:t>1/27/13</a:t>
             </a:fld>
-            <a:endParaRPr lang="en-US"/>
+            <a:endParaRPr lang="fr-CA"/>
           </a:p>
         </p:txBody>
       </p:sp>
@@ -2275,7 +2275,7 @@
           <a:bodyPr/>
           <a:lstStyle/>
           <a:p>
-            <a:endParaRPr lang="en-US"/>
+            <a:endParaRPr lang="fr-CA"/>
           </a:p>
         </p:txBody>
       </p:sp>
@@ -2295,10 +2295,10 @@
           <a:lstStyle/>
           <a:p>
             <a:fld id="{C1FF6DA9-008F-8B48-92A6-B652298478BF}" type="slidenum">
-              <a:rPr lang="en-US" smtClean="0"/>
+              <a:rPr lang="fr-CA" smtClean="0"/>
               <a:t>‹#›</a:t>
             </a:fld>
-            <a:endParaRPr lang="en-US"/>
+            <a:endParaRPr lang="fr-CA"/>
           </a:p>
         </p:txBody>
       </p:sp>
@@ -2357,10 +2357,10 @@
           </a:lstStyle>
           <a:p>
             <a:r>
-              <a:rPr lang="en-US" smtClean="0"/>
+              <a:rPr lang="fr-CA" smtClean="0"/>
               <a:t>Click to edit Master title style</a:t>
             </a:r>
-            <a:endParaRPr lang="en-US"/>
+            <a:endParaRPr lang="fr-CA"/>
           </a:p>
         </p:txBody>
       </p:sp>
@@ -2421,7 +2421,7 @@
             </a:lvl9pPr>
           </a:lstStyle>
           <a:p>
-            <a:endParaRPr lang="en-US"/>
+            <a:endParaRPr lang="fr-CA"/>
           </a:p>
         </p:txBody>
       </p:sp>
@@ -2484,7 +2484,7 @@
           <a:p>
             <a:pPr lvl="0"/>
             <a:r>
-              <a:rPr lang="en-US" smtClean="0"/>
+              <a:rPr lang="fr-CA" smtClean="0"/>
               <a:t>Click to edit Master text styles</a:t>
             </a:r>
           </a:p>
@@ -2506,10 +2506,10 @@
           <a:lstStyle/>
           <a:p>
             <a:fld id="{5BCAD085-E8A6-8845-BD4E-CB4CCA059FC4}" type="datetimeFigureOut">
-              <a:rPr lang="en-US" smtClean="0"/>
+              <a:rPr lang="fr-CA" smtClean="0"/>
               <a:t>1/27/13</a:t>
             </a:fld>
-            <a:endParaRPr lang="en-US"/>
+            <a:endParaRPr lang="fr-CA"/>
           </a:p>
         </p:txBody>
       </p:sp>
@@ -2528,7 +2528,7 @@
           <a:bodyPr/>
           <a:lstStyle/>
           <a:p>
-            <a:endParaRPr lang="en-US"/>
+            <a:endParaRPr lang="fr-CA"/>
           </a:p>
         </p:txBody>
       </p:sp>
@@ -2548,10 +2548,10 @@
           <a:lstStyle/>
           <a:p>
             <a:fld id="{C1FF6DA9-008F-8B48-92A6-B652298478BF}" type="slidenum">
-              <a:rPr lang="en-US" smtClean="0"/>
+              <a:rPr lang="fr-CA" smtClean="0"/>
               <a:t>‹#›</a:t>
             </a:fld>
-            <a:endParaRPr lang="en-US"/>
+            <a:endParaRPr lang="fr-CA"/>
           </a:p>
         </p:txBody>
       </p:sp>
@@ -2616,10 +2616,10 @@
           <a:lstStyle/>
           <a:p>
             <a:r>
-              <a:rPr lang="en-US" smtClean="0"/>
+              <a:rPr lang="fr-CA" smtClean="0"/>
               <a:t>Click to edit Master title style</a:t>
             </a:r>
-            <a:endParaRPr lang="en-US"/>
+            <a:endParaRPr lang="fr-CA"/>
           </a:p>
         </p:txBody>
       </p:sp>
@@ -2650,38 +2650,38 @@
           <a:p>
             <a:pPr lvl="0"/>
             <a:r>
-              <a:rPr lang="en-US" smtClean="0"/>
+              <a:rPr lang="fr-CA" smtClean="0"/>
               <a:t>Click to edit Master text styles</a:t>
             </a:r>
           </a:p>
           <a:p>
             <a:pPr lvl="1"/>
             <a:r>
-              <a:rPr lang="en-US" smtClean="0"/>
+              <a:rPr lang="fr-CA" smtClean="0"/>
               <a:t>Second level</a:t>
             </a:r>
           </a:p>
           <a:p>
             <a:pPr lvl="2"/>
             <a:r>
-              <a:rPr lang="en-US" smtClean="0"/>
+              <a:rPr lang="fr-CA" smtClean="0"/>
               <a:t>Third level</a:t>
             </a:r>
           </a:p>
           <a:p>
             <a:pPr lvl="3"/>
             <a:r>
-              <a:rPr lang="en-US" smtClean="0"/>
+              <a:rPr lang="fr-CA" smtClean="0"/>
               <a:t>Fourth level</a:t>
             </a:r>
           </a:p>
           <a:p>
             <a:pPr lvl="4"/>
             <a:r>
-              <a:rPr lang="en-US" smtClean="0"/>
+              <a:rPr lang="fr-CA" smtClean="0"/>
               <a:t>Fifth level</a:t>
             </a:r>
-            <a:endParaRPr lang="en-US"/>
+            <a:endParaRPr lang="fr-CA"/>
           </a:p>
         </p:txBody>
       </p:sp>
@@ -2719,10 +2719,10 @@
           </a:lstStyle>
           <a:p>
             <a:fld id="{5BCAD085-E8A6-8845-BD4E-CB4CCA059FC4}" type="datetimeFigureOut">
-              <a:rPr lang="en-US" smtClean="0"/>
+              <a:rPr lang="fr-CA" smtClean="0"/>
               <a:t>1/27/13</a:t>
             </a:fld>
-            <a:endParaRPr lang="en-US"/>
+            <a:endParaRPr lang="fr-CA"/>
           </a:p>
         </p:txBody>
       </p:sp>
@@ -2759,7 +2759,7 @@
             </a:lvl1pPr>
           </a:lstStyle>
           <a:p>
-            <a:endParaRPr lang="en-US"/>
+            <a:endParaRPr lang="fr-CA"/>
           </a:p>
         </p:txBody>
       </p:sp>
@@ -2797,10 +2797,10 @@
           </a:lstStyle>
           <a:p>
             <a:fld id="{C1FF6DA9-008F-8B48-92A6-B652298478BF}" type="slidenum">
-              <a:rPr lang="en-US" smtClean="0"/>
+              <a:rPr lang="fr-CA" smtClean="0"/>
               <a:t>‹#›</a:t>
             </a:fld>
-            <a:endParaRPr lang="en-US"/>
+            <a:endParaRPr lang="fr-CA"/>
           </a:p>
         </p:txBody>
       </p:sp>
@@ -2981,7 +2981,7 @@
     </p:bodyStyle>
     <p:otherStyle>
       <a:defPPr>
-        <a:defRPr lang="en-US"/>
+        <a:defRPr lang="fr-CA"/>
       </a:defPPr>
       <a:lvl1pPr marL="0" algn="l" defTabSz="457200" rtl="0" eaLnBrk="1" latinLnBrk="0" hangingPunct="1">
         <a:defRPr sz="1800" kern="1200">

--- a/app/src-tauri/templates/vierge.pptx
+++ b/app/src-tauri/templates/vierge.pptx
@@ -136,8 +136,8 @@
         </p:nvSpPr>
         <p:spPr>
           <a:xfrm>
-            <a:off x="685800" y="2130425"/>
-            <a:ext cx="7772400" cy="1470025"/>
+            <a:off x="914377" y="2130425"/>
+            <a:ext cx="10362941" cy="1470025"/>
           </a:xfrm>
         </p:spPr>
         <p:txBody>
@@ -164,8 +164,8 @@
         </p:nvSpPr>
         <p:spPr>
           <a:xfrm>
-            <a:off x="1371600" y="3886200"/>
-            <a:ext cx="6400800" cy="1752600"/>
+            <a:off x="1828754" y="3886200"/>
+            <a:ext cx="8534187" cy="1752600"/>
           </a:xfrm>
         </p:spPr>
         <p:txBody>
@@ -548,8 +548,8 @@
         </p:nvSpPr>
         <p:spPr>
           <a:xfrm>
-            <a:off x="6629400" y="274638"/>
-            <a:ext cx="2057400" cy="5851525"/>
+            <a:off x="8838979" y="274638"/>
+            <a:ext cx="2743131" cy="5851525"/>
           </a:xfrm>
         </p:spPr>
         <p:txBody>
@@ -576,8 +576,8 @@
         </p:nvSpPr>
         <p:spPr>
           <a:xfrm>
-            <a:off x="457200" y="274638"/>
-            <a:ext cx="6019800" cy="5851525"/>
+            <a:off x="609585" y="274638"/>
+            <a:ext cx="8026199" cy="5851525"/>
           </a:xfrm>
         </p:spPr>
         <p:txBody>
@@ -898,8 +898,8 @@
         </p:nvSpPr>
         <p:spPr>
           <a:xfrm>
-            <a:off x="722313" y="4406900"/>
-            <a:ext cx="7772400" cy="1362075"/>
+            <a:off x="963060" y="4406900"/>
+            <a:ext cx="10362941" cy="1362075"/>
           </a:xfrm>
         </p:spPr>
         <p:txBody>
@@ -930,8 +930,8 @@
         </p:nvSpPr>
         <p:spPr>
           <a:xfrm>
-            <a:off x="722313" y="2906713"/>
-            <a:ext cx="7772400" cy="1500187"/>
+            <a:off x="963060" y="2906713"/>
+            <a:ext cx="10362941" cy="1500187"/>
           </a:xfrm>
         </p:spPr>
         <p:txBody>
@@ -1167,8 +1167,8 @@
         </p:nvSpPr>
         <p:spPr>
           <a:xfrm>
-            <a:off x="457200" y="1600200"/>
-            <a:ext cx="4038600" cy="4525963"/>
+            <a:off x="609585" y="1600200"/>
+            <a:ext cx="5384665" cy="4525963"/>
           </a:xfrm>
         </p:spPr>
         <p:txBody>
@@ -1252,8 +1252,8 @@
         </p:nvSpPr>
         <p:spPr>
           <a:xfrm>
-            <a:off x="4648200" y="1600200"/>
-            <a:ext cx="4038600" cy="4525963"/>
+            <a:off x="6197445" y="1600200"/>
+            <a:ext cx="5384665" cy="4525963"/>
           </a:xfrm>
         </p:spPr>
         <p:txBody>
@@ -1459,8 +1459,8 @@
         </p:nvSpPr>
         <p:spPr>
           <a:xfrm>
-            <a:off x="457200" y="1535113"/>
-            <a:ext cx="4040188" cy="639762"/>
+            <a:off x="609585" y="1535113"/>
+            <a:ext cx="5386783" cy="639762"/>
           </a:xfrm>
         </p:spPr>
         <p:txBody>
@@ -1524,8 +1524,8 @@
         </p:nvSpPr>
         <p:spPr>
           <a:xfrm>
-            <a:off x="457200" y="2174875"/>
-            <a:ext cx="4040188" cy="3951288"/>
+            <a:off x="609585" y="2174875"/>
+            <a:ext cx="5386783" cy="3951288"/>
           </a:xfrm>
         </p:spPr>
         <p:txBody>
@@ -1609,8 +1609,8 @@
         </p:nvSpPr>
         <p:spPr>
           <a:xfrm>
-            <a:off x="4645025" y="1535113"/>
-            <a:ext cx="4041775" cy="639762"/>
+            <a:off x="6193212" y="1535113"/>
+            <a:ext cx="5388899" cy="639762"/>
           </a:xfrm>
         </p:spPr>
         <p:txBody>
@@ -1674,8 +1674,8 @@
         </p:nvSpPr>
         <p:spPr>
           <a:xfrm>
-            <a:off x="4645025" y="2174875"/>
-            <a:ext cx="4041775" cy="3951288"/>
+            <a:off x="6193212" y="2174875"/>
+            <a:ext cx="5388899" cy="3951288"/>
           </a:xfrm>
         </p:spPr>
         <p:txBody>
@@ -2067,8 +2067,8 @@
         </p:nvSpPr>
         <p:spPr>
           <a:xfrm>
-            <a:off x="457200" y="273050"/>
-            <a:ext cx="3008313" cy="1162050"/>
+            <a:off x="609585" y="273050"/>
+            <a:ext cx="4010984" cy="1162050"/>
           </a:xfrm>
         </p:spPr>
         <p:txBody>
@@ -2099,8 +2099,8 @@
         </p:nvSpPr>
         <p:spPr>
           <a:xfrm>
-            <a:off x="3575050" y="273050"/>
-            <a:ext cx="5111750" cy="5853113"/>
+            <a:off x="4766614" y="273050"/>
+            <a:ext cx="6815496" cy="5853113"/>
           </a:xfrm>
         </p:spPr>
         <p:txBody>
@@ -2184,8 +2184,8 @@
         </p:nvSpPr>
         <p:spPr>
           <a:xfrm>
-            <a:off x="457200" y="1435100"/>
-            <a:ext cx="3008313" cy="4691063"/>
+            <a:off x="609585" y="1435100"/>
+            <a:ext cx="4010984" cy="4691063"/>
           </a:xfrm>
         </p:spPr>
         <p:txBody>
@@ -2344,8 +2344,8 @@
         </p:nvSpPr>
         <p:spPr>
           <a:xfrm>
-            <a:off x="1792288" y="4800600"/>
-            <a:ext cx="5486400" cy="566738"/>
+            <a:off x="2389658" y="4800600"/>
+            <a:ext cx="7315017" cy="566738"/>
           </a:xfrm>
         </p:spPr>
         <p:txBody>
@@ -2376,8 +2376,8 @@
         </p:nvSpPr>
         <p:spPr>
           <a:xfrm>
-            <a:off x="1792288" y="612775"/>
-            <a:ext cx="5486400" cy="4114800"/>
+            <a:off x="2389658" y="612775"/>
+            <a:ext cx="7315017" cy="4114800"/>
           </a:xfrm>
         </p:spPr>
         <p:txBody>
@@ -2437,8 +2437,8 @@
         </p:nvSpPr>
         <p:spPr>
           <a:xfrm>
-            <a:off x="1792288" y="5367338"/>
-            <a:ext cx="5486400" cy="804862"/>
+            <a:off x="2389658" y="5367338"/>
+            <a:ext cx="7315017" cy="804862"/>
           </a:xfrm>
         </p:spPr>
         <p:txBody>
@@ -2602,8 +2602,8 @@
         </p:nvSpPr>
         <p:spPr>
           <a:xfrm>
-            <a:off x="457200" y="274638"/>
-            <a:ext cx="8229600" cy="1143000"/>
+            <a:off x="609585" y="274638"/>
+            <a:ext cx="10972526" cy="1143000"/>
           </a:xfrm>
           <a:prstGeom prst="rect">
             <a:avLst/>
@@ -2635,8 +2635,8 @@
         </p:nvSpPr>
         <p:spPr>
           <a:xfrm>
-            <a:off x="457200" y="1600200"/>
-            <a:ext cx="8229600" cy="4525963"/>
+            <a:off x="609585" y="1600200"/>
+            <a:ext cx="10972526" cy="4525963"/>
           </a:xfrm>
           <a:prstGeom prst="rect">
             <a:avLst/>
@@ -2697,8 +2697,8 @@
         </p:nvSpPr>
         <p:spPr>
           <a:xfrm>
-            <a:off x="457200" y="6356350"/>
-            <a:ext cx="2133600" cy="365125"/>
+            <a:off x="609585" y="6356350"/>
+            <a:ext cx="2844729" cy="365125"/>
           </a:xfrm>
           <a:prstGeom prst="rect">
             <a:avLst/>
@@ -2738,8 +2738,8 @@
         </p:nvSpPr>
         <p:spPr>
           <a:xfrm>
-            <a:off x="3124200" y="6356350"/>
-            <a:ext cx="2895600" cy="365125"/>
+            <a:off x="4165496" y="6356350"/>
+            <a:ext cx="3860703" cy="365125"/>
           </a:xfrm>
           <a:prstGeom prst="rect">
             <a:avLst/>
@@ -2775,8 +2775,8 @@
         </p:nvSpPr>
         <p:spPr>
           <a:xfrm>
-            <a:off x="6553200" y="6356350"/>
-            <a:ext cx="2133600" cy="365125"/>
+            <a:off x="8737382" y="6356350"/>
+            <a:ext cx="2844729" cy="365125"/>
           </a:xfrm>
           <a:prstGeom prst="rect">
             <a:avLst/>
